--- a/plots/ae0/ae0_profiles.pptx
+++ b/plots/ae0/ae0_profiles.pptx
@@ -6,6 +6,8 @@
   </p:sldMasterIdLst>
   <p:sldIdLst>
     <p:sldId id="256" r:id="rId2"/>
+    <p:sldId id="258" r:id="rId3"/>
+    <p:sldId id="257" r:id="rId4"/>
   </p:sldIdLst>
   <p:sldSz cx="12192000" cy="6858000"/>
   <p:notesSz cx="6858000" cy="9144000"/>
@@ -104,6 +106,11 @@
       </a:defRPr>
     </a:lvl9pPr>
   </p:defaultTextStyle>
+  <p:extLst>
+    <p:ext uri="{EFAFB233-063F-42B5-8137-9DF3F51BA10A}">
+      <p15:sldGuideLst xmlns:p15="http://schemas.microsoft.com/office/powerpoint/2012/main"/>
+    </p:ext>
+  </p:extLst>
 </p:presentation>
 </file>
 
@@ -254,7 +261,7 @@
           <a:p>
             <a:fld id="{C700E479-7602-4B1D-9C35-5DE4BE6BA11D}" type="datetimeFigureOut">
               <a:rPr lang="en-US" smtClean="0"/>
-              <a:t>4/16/2026</a:t>
+              <a:t>4/20/2026</a:t>
             </a:fld>
             <a:endParaRPr lang="en-US"/>
           </a:p>
@@ -452,7 +459,7 @@
           <a:p>
             <a:fld id="{C700E479-7602-4B1D-9C35-5DE4BE6BA11D}" type="datetimeFigureOut">
               <a:rPr lang="en-US" smtClean="0"/>
-              <a:t>4/16/2026</a:t>
+              <a:t>4/20/2026</a:t>
             </a:fld>
             <a:endParaRPr lang="en-US"/>
           </a:p>
@@ -660,7 +667,7 @@
           <a:p>
             <a:fld id="{C700E479-7602-4B1D-9C35-5DE4BE6BA11D}" type="datetimeFigureOut">
               <a:rPr lang="en-US" smtClean="0"/>
-              <a:t>4/16/2026</a:t>
+              <a:t>4/20/2026</a:t>
             </a:fld>
             <a:endParaRPr lang="en-US"/>
           </a:p>
@@ -858,7 +865,7 @@
           <a:p>
             <a:fld id="{C700E479-7602-4B1D-9C35-5DE4BE6BA11D}" type="datetimeFigureOut">
               <a:rPr lang="en-US" smtClean="0"/>
-              <a:t>4/16/2026</a:t>
+              <a:t>4/20/2026</a:t>
             </a:fld>
             <a:endParaRPr lang="en-US"/>
           </a:p>
@@ -1133,7 +1140,7 @@
           <a:p>
             <a:fld id="{C700E479-7602-4B1D-9C35-5DE4BE6BA11D}" type="datetimeFigureOut">
               <a:rPr lang="en-US" smtClean="0"/>
-              <a:t>4/16/2026</a:t>
+              <a:t>4/20/2026</a:t>
             </a:fld>
             <a:endParaRPr lang="en-US"/>
           </a:p>
@@ -1398,7 +1405,7 @@
           <a:p>
             <a:fld id="{C700E479-7602-4B1D-9C35-5DE4BE6BA11D}" type="datetimeFigureOut">
               <a:rPr lang="en-US" smtClean="0"/>
-              <a:t>4/16/2026</a:t>
+              <a:t>4/20/2026</a:t>
             </a:fld>
             <a:endParaRPr lang="en-US"/>
           </a:p>
@@ -1810,7 +1817,7 @@
           <a:p>
             <a:fld id="{C700E479-7602-4B1D-9C35-5DE4BE6BA11D}" type="datetimeFigureOut">
               <a:rPr lang="en-US" smtClean="0"/>
-              <a:t>4/16/2026</a:t>
+              <a:t>4/20/2026</a:t>
             </a:fld>
             <a:endParaRPr lang="en-US"/>
           </a:p>
@@ -1951,7 +1958,7 @@
           <a:p>
             <a:fld id="{C700E479-7602-4B1D-9C35-5DE4BE6BA11D}" type="datetimeFigureOut">
               <a:rPr lang="en-US" smtClean="0"/>
-              <a:t>4/16/2026</a:t>
+              <a:t>4/20/2026</a:t>
             </a:fld>
             <a:endParaRPr lang="en-US"/>
           </a:p>
@@ -2064,7 +2071,7 @@
           <a:p>
             <a:fld id="{C700E479-7602-4B1D-9C35-5DE4BE6BA11D}" type="datetimeFigureOut">
               <a:rPr lang="en-US" smtClean="0"/>
-              <a:t>4/16/2026</a:t>
+              <a:t>4/20/2026</a:t>
             </a:fld>
             <a:endParaRPr lang="en-US"/>
           </a:p>
@@ -2375,7 +2382,7 @@
           <a:p>
             <a:fld id="{C700E479-7602-4B1D-9C35-5DE4BE6BA11D}" type="datetimeFigureOut">
               <a:rPr lang="en-US" smtClean="0"/>
-              <a:t>4/16/2026</a:t>
+              <a:t>4/20/2026</a:t>
             </a:fld>
             <a:endParaRPr lang="en-US"/>
           </a:p>
@@ -2663,7 +2670,7 @@
           <a:p>
             <a:fld id="{C700E479-7602-4B1D-9C35-5DE4BE6BA11D}" type="datetimeFigureOut">
               <a:rPr lang="en-US" smtClean="0"/>
-              <a:t>4/16/2026</a:t>
+              <a:t>4/20/2026</a:t>
             </a:fld>
             <a:endParaRPr lang="en-US"/>
           </a:p>
@@ -2904,7 +2911,7 @@
           <a:p>
             <a:fld id="{C700E479-7602-4B1D-9C35-5DE4BE6BA11D}" type="datetimeFigureOut">
               <a:rPr lang="en-US" smtClean="0"/>
-              <a:t>4/16/2026</a:t>
+              <a:t>4/20/2026</a:t>
             </a:fld>
             <a:endParaRPr lang="en-US"/>
           </a:p>
@@ -3349,7 +3356,7 @@
         </p:blipFill>
         <p:spPr>
           <a:xfrm>
-            <a:off x="174181" y="3103863"/>
+            <a:off x="2996209" y="3350856"/>
             <a:ext cx="2499297" cy="3081144"/>
           </a:xfrm>
           <a:prstGeom prst="rect">
@@ -3385,7 +3392,7 @@
         </p:blipFill>
         <p:spPr>
           <a:xfrm>
-            <a:off x="6096000" y="3073385"/>
+            <a:off x="2996209" y="91228"/>
             <a:ext cx="2499297" cy="3081144"/>
           </a:xfrm>
           <a:prstGeom prst="rect">
@@ -3395,10 +3402,10 @@
       </p:pic>
       <p:pic>
         <p:nvPicPr>
-          <p:cNvPr id="22" name="Picture 21">
-            <a:extLst>
-              <a:ext uri="{FF2B5EF4-FFF2-40B4-BE49-F238E27FC236}">
-                <a16:creationId xmlns:a16="http://schemas.microsoft.com/office/drawing/2014/main" id="{993097D6-4842-42B0-B5E7-AD591A19AF5B}"/>
+          <p:cNvPr id="24" name="Picture 23">
+            <a:extLst>
+              <a:ext uri="{FF2B5EF4-FFF2-40B4-BE49-F238E27FC236}">
+                <a16:creationId xmlns:a16="http://schemas.microsoft.com/office/drawing/2014/main" id="{F7C5FD87-EA3C-837B-5CEC-DAEF094A7E0C}"/>
               </a:ext>
             </a:extLst>
           </p:cNvPr>
@@ -3421,43 +3428,7 @@
         </p:blipFill>
         <p:spPr>
           <a:xfrm>
-            <a:off x="8595297" y="3042906"/>
-            <a:ext cx="2499297" cy="3142101"/>
-          </a:xfrm>
-          <a:prstGeom prst="rect">
-            <a:avLst/>
-          </a:prstGeom>
-        </p:spPr>
-      </p:pic>
-      <p:pic>
-        <p:nvPicPr>
-          <p:cNvPr id="24" name="Picture 23">
-            <a:extLst>
-              <a:ext uri="{FF2B5EF4-FFF2-40B4-BE49-F238E27FC236}">
-                <a16:creationId xmlns:a16="http://schemas.microsoft.com/office/drawing/2014/main" id="{F7C5FD87-EA3C-837B-5CEC-DAEF094A7E0C}"/>
-              </a:ext>
-            </a:extLst>
-          </p:cNvPr>
-          <p:cNvPicPr>
-            <a:picLocks noChangeAspect="1"/>
-          </p:cNvPicPr>
-          <p:nvPr/>
-        </p:nvPicPr>
-        <p:blipFill>
-          <a:blip r:embed="rId5">
-            <a:extLst>
-              <a:ext uri="{28A0092B-C50C-407E-A947-70E740481C1C}">
-                <a14:useLocalDpi xmlns:a14="http://schemas.microsoft.com/office/drawing/2010/main" val="0"/>
-              </a:ext>
-            </a:extLst>
-          </a:blip>
-          <a:stretch>
-            <a:fillRect/>
-          </a:stretch>
-        </p:blipFill>
-        <p:spPr>
-          <a:xfrm>
-            <a:off x="2784331" y="3103863"/>
+            <a:off x="5606359" y="3350856"/>
             <a:ext cx="2450810" cy="3081144"/>
           </a:xfrm>
           <a:prstGeom prst="rect">
@@ -3480,7 +3451,7 @@
           <p:nvPr/>
         </p:nvPicPr>
         <p:blipFill>
-          <a:blip r:embed="rId6">
+          <a:blip r:embed="rId5">
             <a:extLst>
               <a:ext uri="{28A0092B-C50C-407E-A947-70E740481C1C}">
                 <a14:useLocalDpi xmlns:a14="http://schemas.microsoft.com/office/drawing/2010/main" val="0"/>
@@ -3493,8 +3464,8 @@
         </p:blipFill>
         <p:spPr>
           <a:xfrm>
-            <a:off x="7113123" y="89703"/>
-            <a:ext cx="2964347" cy="2953203"/>
+            <a:off x="924826" y="589198"/>
+            <a:ext cx="2071383" cy="2063596"/>
           </a:xfrm>
           <a:prstGeom prst="rect">
             <a:avLst/>
@@ -3516,7 +3487,7 @@
           <p:nvPr/>
         </p:nvPicPr>
         <p:blipFill>
-          <a:blip r:embed="rId7">
+          <a:blip r:embed="rId6">
             <a:extLst>
               <a:ext uri="{28A0092B-C50C-407E-A947-70E740481C1C}">
                 <a14:useLocalDpi xmlns:a14="http://schemas.microsoft.com/office/drawing/2010/main" val="0"/>
@@ -3529,8 +3500,44 @@
         </p:blipFill>
         <p:spPr>
           <a:xfrm>
-            <a:off x="1297183" y="120182"/>
-            <a:ext cx="2964347" cy="2953203"/>
+            <a:off x="924826" y="3859630"/>
+            <a:ext cx="2071383" cy="2063596"/>
+          </a:xfrm>
+          <a:prstGeom prst="rect">
+            <a:avLst/>
+          </a:prstGeom>
+        </p:spPr>
+      </p:pic>
+      <p:pic>
+        <p:nvPicPr>
+          <p:cNvPr id="30" name="Picture 29">
+            <a:extLst>
+              <a:ext uri="{FF2B5EF4-FFF2-40B4-BE49-F238E27FC236}">
+                <a16:creationId xmlns:a16="http://schemas.microsoft.com/office/drawing/2014/main" id="{4BD58738-7FFD-4398-AA98-6745A02D44F9}"/>
+              </a:ext>
+            </a:extLst>
+          </p:cNvPr>
+          <p:cNvPicPr>
+            <a:picLocks noChangeAspect="1"/>
+          </p:cNvPicPr>
+          <p:nvPr/>
+        </p:nvPicPr>
+        <p:blipFill>
+          <a:blip r:embed="rId7">
+            <a:extLst>
+              <a:ext uri="{28A0092B-C50C-407E-A947-70E740481C1C}">
+                <a14:useLocalDpi xmlns:a14="http://schemas.microsoft.com/office/drawing/2010/main" val="0"/>
+              </a:ext>
+            </a:extLst>
+          </a:blip>
+          <a:stretch>
+            <a:fillRect/>
+          </a:stretch>
+        </p:blipFill>
+        <p:spPr>
+          <a:xfrm>
+            <a:off x="5606359" y="91228"/>
+            <a:ext cx="2490481" cy="3081144"/>
           </a:xfrm>
           <a:prstGeom prst="rect">
             <a:avLst/>
@@ -3541,6 +3548,358 @@
     <p:extLst>
       <p:ext uri="{BB962C8B-B14F-4D97-AF65-F5344CB8AC3E}">
         <p14:creationId xmlns:p14="http://schemas.microsoft.com/office/powerpoint/2010/main" val="1313412202"/>
+      </p:ext>
+    </p:extLst>
+  </p:cSld>
+  <p:clrMapOvr>
+    <a:masterClrMapping/>
+  </p:clrMapOvr>
+</p:sld>
+</file>
+
+<file path=ppt/slides/slide2.xml><?xml version="1.0" encoding="utf-8"?>
+<p:sld xmlns:a="http://schemas.openxmlformats.org/drawingml/2006/main" xmlns:r="http://schemas.openxmlformats.org/officeDocument/2006/relationships" xmlns:p="http://schemas.openxmlformats.org/presentationml/2006/main">
+  <p:cSld>
+    <p:spTree>
+      <p:nvGrpSpPr>
+        <p:cNvPr id="1" name="">
+          <a:extLst>
+            <a:ext uri="{FF2B5EF4-FFF2-40B4-BE49-F238E27FC236}">
+              <a16:creationId xmlns:a16="http://schemas.microsoft.com/office/drawing/2014/main" id="{A80ACF08-7B1C-C4AA-FAEF-57A0871D84B7}"/>
+            </a:ext>
+          </a:extLst>
+        </p:cNvPr>
+        <p:cNvGrpSpPr/>
+        <p:nvPr/>
+      </p:nvGrpSpPr>
+      <p:grpSpPr>
+        <a:xfrm>
+          <a:off x="0" y="0"/>
+          <a:ext cx="0" cy="0"/>
+          <a:chOff x="0" y="0"/>
+          <a:chExt cx="0" cy="0"/>
+        </a:xfrm>
+      </p:grpSpPr>
+      <p:pic>
+        <p:nvPicPr>
+          <p:cNvPr id="26" name="Picture 25">
+            <a:extLst>
+              <a:ext uri="{FF2B5EF4-FFF2-40B4-BE49-F238E27FC236}">
+                <a16:creationId xmlns:a16="http://schemas.microsoft.com/office/drawing/2014/main" id="{69F3B28E-19B2-4E1D-EE63-168D2AB5B373}"/>
+              </a:ext>
+            </a:extLst>
+          </p:cNvPr>
+          <p:cNvPicPr>
+            <a:picLocks noChangeAspect="1"/>
+          </p:cNvPicPr>
+          <p:nvPr/>
+        </p:nvPicPr>
+        <p:blipFill>
+          <a:blip r:embed="rId2">
+            <a:extLst>
+              <a:ext uri="{28A0092B-C50C-407E-A947-70E740481C1C}">
+                <a14:useLocalDpi xmlns:a14="http://schemas.microsoft.com/office/drawing/2010/main" val="0"/>
+              </a:ext>
+            </a:extLst>
+          </a:blip>
+          <a:stretch>
+            <a:fillRect/>
+          </a:stretch>
+        </p:blipFill>
+        <p:spPr>
+          <a:xfrm>
+            <a:off x="924826" y="589198"/>
+            <a:ext cx="2071383" cy="2063596"/>
+          </a:xfrm>
+          <a:prstGeom prst="rect">
+            <a:avLst/>
+          </a:prstGeom>
+        </p:spPr>
+      </p:pic>
+      <p:pic>
+        <p:nvPicPr>
+          <p:cNvPr id="28" name="Picture 27">
+            <a:extLst>
+              <a:ext uri="{FF2B5EF4-FFF2-40B4-BE49-F238E27FC236}">
+                <a16:creationId xmlns:a16="http://schemas.microsoft.com/office/drawing/2014/main" id="{E6D8FDE9-AD2A-9373-A4DF-795C1B20477A}"/>
+              </a:ext>
+            </a:extLst>
+          </p:cNvPr>
+          <p:cNvPicPr>
+            <a:picLocks noChangeAspect="1"/>
+          </p:cNvPicPr>
+          <p:nvPr/>
+        </p:nvPicPr>
+        <p:blipFill>
+          <a:blip r:embed="rId3">
+            <a:extLst>
+              <a:ext uri="{28A0092B-C50C-407E-A947-70E740481C1C}">
+                <a14:useLocalDpi xmlns:a14="http://schemas.microsoft.com/office/drawing/2010/main" val="0"/>
+              </a:ext>
+            </a:extLst>
+          </a:blip>
+          <a:stretch>
+            <a:fillRect/>
+          </a:stretch>
+        </p:blipFill>
+        <p:spPr>
+          <a:xfrm>
+            <a:off x="924826" y="3859630"/>
+            <a:ext cx="2071383" cy="2063596"/>
+          </a:xfrm>
+          <a:prstGeom prst="rect">
+            <a:avLst/>
+          </a:prstGeom>
+        </p:spPr>
+      </p:pic>
+      <p:pic>
+        <p:nvPicPr>
+          <p:cNvPr id="3" name="Picture 2">
+            <a:extLst>
+              <a:ext uri="{FF2B5EF4-FFF2-40B4-BE49-F238E27FC236}">
+                <a16:creationId xmlns:a16="http://schemas.microsoft.com/office/drawing/2014/main" id="{A80D3824-7120-EBA0-6592-D9AC13CE32AD}"/>
+              </a:ext>
+            </a:extLst>
+          </p:cNvPr>
+          <p:cNvPicPr>
+            <a:picLocks noChangeAspect="1"/>
+          </p:cNvPicPr>
+          <p:nvPr/>
+        </p:nvPicPr>
+        <p:blipFill>
+          <a:blip r:embed="rId4">
+            <a:extLst>
+              <a:ext uri="{28A0092B-C50C-407E-A947-70E740481C1C}">
+                <a14:useLocalDpi xmlns:a14="http://schemas.microsoft.com/office/drawing/2010/main" val="0"/>
+              </a:ext>
+            </a:extLst>
+          </a:blip>
+          <a:stretch>
+            <a:fillRect/>
+          </a:stretch>
+        </p:blipFill>
+        <p:spPr>
+          <a:xfrm>
+            <a:off x="2996209" y="182319"/>
+            <a:ext cx="2499297" cy="3081144"/>
+          </a:xfrm>
+          <a:prstGeom prst="rect">
+            <a:avLst/>
+          </a:prstGeom>
+        </p:spPr>
+      </p:pic>
+      <p:pic>
+        <p:nvPicPr>
+          <p:cNvPr id="5" name="Picture 4">
+            <a:extLst>
+              <a:ext uri="{FF2B5EF4-FFF2-40B4-BE49-F238E27FC236}">
+                <a16:creationId xmlns:a16="http://schemas.microsoft.com/office/drawing/2014/main" id="{BE4A28C1-216D-5727-2C63-920EF2E51255}"/>
+              </a:ext>
+            </a:extLst>
+          </p:cNvPr>
+          <p:cNvPicPr>
+            <a:picLocks noChangeAspect="1"/>
+          </p:cNvPicPr>
+          <p:nvPr/>
+        </p:nvPicPr>
+        <p:blipFill>
+          <a:blip r:embed="rId5">
+            <a:extLst>
+              <a:ext uri="{28A0092B-C50C-407E-A947-70E740481C1C}">
+                <a14:useLocalDpi xmlns:a14="http://schemas.microsoft.com/office/drawing/2010/main" val="0"/>
+              </a:ext>
+            </a:extLst>
+          </a:blip>
+          <a:stretch>
+            <a:fillRect/>
+          </a:stretch>
+        </p:blipFill>
+        <p:spPr>
+          <a:xfrm>
+            <a:off x="5495507" y="182320"/>
+            <a:ext cx="2490480" cy="3081143"/>
+          </a:xfrm>
+          <a:prstGeom prst="rect">
+            <a:avLst/>
+          </a:prstGeom>
+        </p:spPr>
+      </p:pic>
+      <p:pic>
+        <p:nvPicPr>
+          <p:cNvPr id="7" name="Picture 6">
+            <a:extLst>
+              <a:ext uri="{FF2B5EF4-FFF2-40B4-BE49-F238E27FC236}">
+                <a16:creationId xmlns:a16="http://schemas.microsoft.com/office/drawing/2014/main" id="{D015B00D-9B65-0D3C-03C1-B02649F63271}"/>
+              </a:ext>
+            </a:extLst>
+          </p:cNvPr>
+          <p:cNvPicPr>
+            <a:picLocks noChangeAspect="1"/>
+          </p:cNvPicPr>
+          <p:nvPr/>
+        </p:nvPicPr>
+        <p:blipFill>
+          <a:blip r:embed="rId6">
+            <a:extLst>
+              <a:ext uri="{28A0092B-C50C-407E-A947-70E740481C1C}">
+                <a14:useLocalDpi xmlns:a14="http://schemas.microsoft.com/office/drawing/2010/main" val="0"/>
+              </a:ext>
+            </a:extLst>
+          </a:blip>
+          <a:stretch>
+            <a:fillRect/>
+          </a:stretch>
+        </p:blipFill>
+        <p:spPr>
+          <a:xfrm>
+            <a:off x="2996209" y="3350855"/>
+            <a:ext cx="2499298" cy="3081145"/>
+          </a:xfrm>
+          <a:prstGeom prst="rect">
+            <a:avLst/>
+          </a:prstGeom>
+        </p:spPr>
+      </p:pic>
+      <p:pic>
+        <p:nvPicPr>
+          <p:cNvPr id="9" name="Picture 8">
+            <a:extLst>
+              <a:ext uri="{FF2B5EF4-FFF2-40B4-BE49-F238E27FC236}">
+                <a16:creationId xmlns:a16="http://schemas.microsoft.com/office/drawing/2014/main" id="{2AF9CD4C-469B-72BB-4A05-EC29FC9E438C}"/>
+              </a:ext>
+            </a:extLst>
+          </p:cNvPr>
+          <p:cNvPicPr>
+            <a:picLocks noChangeAspect="1"/>
+          </p:cNvPicPr>
+          <p:nvPr/>
+        </p:nvPicPr>
+        <p:blipFill>
+          <a:blip r:embed="rId7">
+            <a:extLst>
+              <a:ext uri="{28A0092B-C50C-407E-A947-70E740481C1C}">
+                <a14:useLocalDpi xmlns:a14="http://schemas.microsoft.com/office/drawing/2010/main" val="0"/>
+              </a:ext>
+            </a:extLst>
+          </a:blip>
+          <a:stretch>
+            <a:fillRect/>
+          </a:stretch>
+        </p:blipFill>
+        <p:spPr>
+          <a:xfrm>
+            <a:off x="5495506" y="3350855"/>
+            <a:ext cx="2499298" cy="3092052"/>
+          </a:xfrm>
+          <a:prstGeom prst="rect">
+            <a:avLst/>
+          </a:prstGeom>
+        </p:spPr>
+      </p:pic>
+      <p:sp>
+        <p:nvSpPr>
+          <p:cNvPr id="10" name="TextBox 9">
+            <a:extLst>
+              <a:ext uri="{FF2B5EF4-FFF2-40B4-BE49-F238E27FC236}">
+                <a16:creationId xmlns:a16="http://schemas.microsoft.com/office/drawing/2014/main" id="{DCEB84AB-0A79-8A39-9FF1-BAB298809325}"/>
+              </a:ext>
+            </a:extLst>
+          </p:cNvPr>
+          <p:cNvSpPr txBox="1"/>
+          <p:nvPr/>
+        </p:nvSpPr>
+        <p:spPr>
+          <a:xfrm>
+            <a:off x="5270939" y="55996"/>
+            <a:ext cx="1303283" cy="230832"/>
+          </a:xfrm>
+          <a:prstGeom prst="rect">
+            <a:avLst/>
+          </a:prstGeom>
+          <a:noFill/>
+        </p:spPr>
+        <p:txBody>
+          <a:bodyPr wrap="square" rtlCol="0">
+            <a:spAutoFit/>
+          </a:bodyPr>
+          <a:lstStyle/>
+          <a:p>
+            <a:r>
+              <a:rPr lang="en-US" sz="900" dirty="0"/>
+              <a:t>Linear drag</a:t>
+            </a:r>
+          </a:p>
+        </p:txBody>
+      </p:sp>
+      <p:sp>
+        <p:nvSpPr>
+          <p:cNvPr id="11" name="TextBox 10">
+            <a:extLst>
+              <a:ext uri="{FF2B5EF4-FFF2-40B4-BE49-F238E27FC236}">
+                <a16:creationId xmlns:a16="http://schemas.microsoft.com/office/drawing/2014/main" id="{D00D9FA8-21A2-B85A-F7A8-67F357EE4DD2}"/>
+              </a:ext>
+            </a:extLst>
+          </p:cNvPr>
+          <p:cNvSpPr txBox="1"/>
+          <p:nvPr/>
+        </p:nvSpPr>
+        <p:spPr>
+          <a:xfrm>
+            <a:off x="5270939" y="3235439"/>
+            <a:ext cx="1303283" cy="230832"/>
+          </a:xfrm>
+          <a:prstGeom prst="rect">
+            <a:avLst/>
+          </a:prstGeom>
+          <a:noFill/>
+        </p:spPr>
+        <p:txBody>
+          <a:bodyPr wrap="square" rtlCol="0">
+            <a:spAutoFit/>
+          </a:bodyPr>
+          <a:lstStyle/>
+          <a:p>
+            <a:r>
+              <a:rPr lang="en-US" sz="900" dirty="0"/>
+              <a:t>Linear drag</a:t>
+            </a:r>
+          </a:p>
+        </p:txBody>
+      </p:sp>
+    </p:spTree>
+    <p:extLst>
+      <p:ext uri="{BB962C8B-B14F-4D97-AF65-F5344CB8AC3E}">
+        <p14:creationId xmlns:p14="http://schemas.microsoft.com/office/powerpoint/2010/main" val="2385601576"/>
+      </p:ext>
+    </p:extLst>
+  </p:cSld>
+  <p:clrMapOvr>
+    <a:masterClrMapping/>
+  </p:clrMapOvr>
+</p:sld>
+</file>
+
+<file path=ppt/slides/slide3.xml><?xml version="1.0" encoding="utf-8"?>
+<p:sld xmlns:a="http://schemas.openxmlformats.org/drawingml/2006/main" xmlns:r="http://schemas.openxmlformats.org/officeDocument/2006/relationships" xmlns:p="http://schemas.openxmlformats.org/presentationml/2006/main">
+  <p:cSld>
+    <p:spTree>
+      <p:nvGrpSpPr>
+        <p:cNvPr id="1" name=""/>
+        <p:cNvGrpSpPr/>
+        <p:nvPr/>
+      </p:nvGrpSpPr>
+      <p:grpSpPr>
+        <a:xfrm>
+          <a:off x="0" y="0"/>
+          <a:ext cx="0" cy="0"/>
+          <a:chOff x="0" y="0"/>
+          <a:chExt cx="0" cy="0"/>
+        </a:xfrm>
+      </p:grpSpPr>
+    </p:spTree>
+    <p:extLst>
+      <p:ext uri="{BB962C8B-B14F-4D97-AF65-F5344CB8AC3E}">
+        <p14:creationId xmlns:p14="http://schemas.microsoft.com/office/powerpoint/2010/main" val="156694126"/>
       </p:ext>
     </p:extLst>
   </p:cSld>
